--- a/generated/Tier 1 Broker Scorecards/American Fleet Insurance_Broker_Scorecard.pptx
+++ b/generated/Tier 1 Broker Scorecards/American Fleet Insurance_Broker_Scorecard.pptx
@@ -3357,7 +3357,7 @@
                         <a:rPr sz="800">
                           <a:latin typeface="Segoe UI"/>
                         </a:rPr>
-                        <a:t>$10,036,377.54 / $10,904,341.67 / $3,705,189.49</a:t>
+                        <a:t>$10,036,377.54 / $10,941,034.30 / $3,741,882.12</a:t>
                       </a:r>
                     </a:p>
                   </a:txBody>
@@ -3431,7 +3431,7 @@
                         <a:rPr sz="900">
                           <a:latin typeface="Segoe UI"/>
                         </a:rPr>
-                        <a:t>$14,050,928.56  (26.4% achieved)</a:t>
+                        <a:t>$14,050,928.56  (26.6% achieved)</a:t>
                       </a:r>
                     </a:p>
                   </a:txBody>
@@ -3653,7 +3653,7 @@
                         <a:rPr sz="900">
                           <a:latin typeface="Segoe UI"/>
                         </a:rPr>
-                        <a:t>Fleet Subs: 121  |  Binds: 8</a:t>
+                        <a:t>Fleet Subs: 122  |  Binds: 8</a:t>
                       </a:r>
                     </a:p>
                   </a:txBody>
@@ -3690,7 +3690,7 @@
                         <a:rPr sz="900">
                           <a:latin typeface="Segoe UI"/>
                         </a:rPr>
-                        <a:t>Fleet Bound Premium: $376,481.10</a:t>
+                        <a:t>Fleet Bound Premium: $376,183.44</a:t>
                       </a:r>
                     </a:p>
                   </a:txBody>
@@ -3727,7 +3727,7 @@
                         <a:rPr sz="900">
                           <a:latin typeface="Segoe UI"/>
                         </a:rPr>
-                        <a:t>Fleet Book %: 10.2%</a:t>
+                        <a:t>Fleet Book %: 10.1%</a:t>
                       </a:r>
                     </a:p>
                   </a:txBody>
@@ -3766,7 +3766,7 @@
                         <a:rPr sz="900">
                           <a:latin typeface="Segoe UI"/>
                         </a:rPr>
-                        <a:t>Non-Fleet Subs: 2375  |  Binds: 187</a:t>
+                        <a:t>Non-Fleet Subs: 2399  |  Binds: 189</a:t>
                       </a:r>
                     </a:p>
                   </a:txBody>
@@ -3803,7 +3803,7 @@
                         <a:rPr sz="900">
                           <a:latin typeface="Segoe UI"/>
                         </a:rPr>
-                        <a:t>Non-Fleet Bound Premium: $3,328,708.39</a:t>
+                        <a:t>Non-Fleet Bound Premium: $3,365,698.68</a:t>
                       </a:r>
                     </a:p>
                   </a:txBody>
@@ -3840,7 +3840,7 @@
                         <a:rPr sz="900">
                           <a:latin typeface="Segoe UI"/>
                         </a:rPr>
-                        <a:t>Non-Fleet Book %: 89.8%</a:t>
+                        <a:t>Non-Fleet Book %: 89.9%</a:t>
                       </a:r>
                     </a:p>
                   </a:txBody>
@@ -4428,7 +4428,7 @@
                           </a:solidFill>
                           <a:latin typeface="Segoe UI"/>
                         </a:rPr>
-                        <a:t>324</a:t>
+                        <a:t>351</a:t>
                       </a:r>
                     </a:p>
                   </a:txBody>
@@ -4465,7 +4465,7 @@
                         <a:rPr sz="800">
                           <a:latin typeface="Segoe UI"/>
                         </a:rPr>
-                        <a:t>604</a:t>
+                        <a:t>603</a:t>
                       </a:r>
                     </a:p>
                   </a:txBody>
@@ -4581,90 +4581,7 @@
                         <a:rPr sz="800">
                           <a:latin typeface="Segoe UI"/>
                         </a:rPr>
-                        <a:t>13.3%</a:t>
-                      </a:r>
-                    </a:p>
-                  </a:txBody>
-                  <a:tcPr marL="114300" marR="91425" marT="45700" marB="45700">
-                    <a:solidFill>
-                      <a:srgbClr val="F5F3FF"/>
-                    </a:solidFill>
-                    <a:lnL w="6350" cap="flat" cmpd="sng">
-                      <a:solidFill>
-                        <a:srgbClr val="E5E7EB"/>
-                      </a:solidFill>
-                    </a:lnL>
-                    <a:lnR w="6350" cap="flat" cmpd="sng">
-                      <a:solidFill>
-                        <a:srgbClr val="E5E7EB"/>
-                      </a:solidFill>
-                    </a:lnR>
-                    <a:lnT w="6350" cap="flat" cmpd="sng">
-                      <a:solidFill>
-                        <a:srgbClr val="E5E7EB"/>
-                      </a:solidFill>
-                    </a:lnT>
-                    <a:lnB w="6350" cap="flat" cmpd="sng">
-                      <a:solidFill>
-                        <a:srgbClr val="E5E7EB"/>
-                      </a:solidFill>
-                    </a:lnB>
-                  </a:tcPr>
-                </a:tc>
-                <a:tc>
-                  <a:txBody>
-                    <a:bodyPr/>
-                    <a:lstStyle/>
-                    <a:p>
-                      <a:pPr algn="ctr"/>
-                      <a:r>
-                        <a:rPr sz="800">
-                          <a:solidFill>
-                            <a:srgbClr val="DC2626"/>
-                          </a:solidFill>
-                          <a:latin typeface="Segoe UI"/>
-                        </a:rPr>
-                        <a:t>10.9%</a:t>
-                      </a:r>
-                    </a:p>
-                  </a:txBody>
-                  <a:tcPr marL="114300" marR="91425" marT="45700" marB="45700">
-                    <a:solidFill>
-                      <a:srgbClr val="F5F3FF"/>
-                    </a:solidFill>
-                    <a:lnL w="6350" cap="flat" cmpd="sng">
-                      <a:solidFill>
-                        <a:srgbClr val="E5E7EB"/>
-                      </a:solidFill>
-                    </a:lnL>
-                    <a:lnR w="6350" cap="flat" cmpd="sng">
-                      <a:solidFill>
-                        <a:srgbClr val="E5E7EB"/>
-                      </a:solidFill>
-                    </a:lnR>
-                    <a:lnT w="6350" cap="flat" cmpd="sng">
-                      <a:solidFill>
-                        <a:srgbClr val="E5E7EB"/>
-                      </a:solidFill>
-                    </a:lnT>
-                    <a:lnB w="6350" cap="flat" cmpd="sng">
-                      <a:solidFill>
-                        <a:srgbClr val="E5E7EB"/>
-                      </a:solidFill>
-                    </a:lnB>
-                  </a:tcPr>
-                </a:tc>
-                <a:tc>
-                  <a:txBody>
-                    <a:bodyPr/>
-                    <a:lstStyle/>
-                    <a:p>
-                      <a:pPr algn="ctr"/>
-                      <a:r>
-                        <a:rPr sz="800">
-                          <a:latin typeface="Segoe UI"/>
-                        </a:rPr>
-                        <a:t>18.1%</a:t>
+                        <a:t>13.1%</a:t>
                       </a:r>
                     </a:p>
                   </a:txBody>
@@ -4747,7 +4664,90 @@
                         <a:rPr sz="800">
                           <a:latin typeface="Segoe UI"/>
                         </a:rPr>
-                        <a:t>18.7%</a:t>
+                        <a:t>18.1%</a:t>
+                      </a:r>
+                    </a:p>
+                  </a:txBody>
+                  <a:tcPr marL="114300" marR="91425" marT="45700" marB="45700">
+                    <a:solidFill>
+                      <a:srgbClr val="F5F3FF"/>
+                    </a:solidFill>
+                    <a:lnL w="6350" cap="flat" cmpd="sng">
+                      <a:solidFill>
+                        <a:srgbClr val="E5E7EB"/>
+                      </a:solidFill>
+                    </a:lnL>
+                    <a:lnR w="6350" cap="flat" cmpd="sng">
+                      <a:solidFill>
+                        <a:srgbClr val="E5E7EB"/>
+                      </a:solidFill>
+                    </a:lnR>
+                    <a:lnT w="6350" cap="flat" cmpd="sng">
+                      <a:solidFill>
+                        <a:srgbClr val="E5E7EB"/>
+                      </a:solidFill>
+                    </a:lnT>
+                    <a:lnB w="6350" cap="flat" cmpd="sng">
+                      <a:solidFill>
+                        <a:srgbClr val="E5E7EB"/>
+                      </a:solidFill>
+                    </a:lnB>
+                  </a:tcPr>
+                </a:tc>
+                <a:tc>
+                  <a:txBody>
+                    <a:bodyPr/>
+                    <a:lstStyle/>
+                    <a:p>
+                      <a:pPr algn="ctr"/>
+                      <a:r>
+                        <a:rPr sz="800">
+                          <a:solidFill>
+                            <a:srgbClr val="DC2626"/>
+                          </a:solidFill>
+                          <a:latin typeface="Segoe UI"/>
+                        </a:rPr>
+                        <a:t>10.8%</a:t>
+                      </a:r>
+                    </a:p>
+                  </a:txBody>
+                  <a:tcPr marL="114300" marR="91425" marT="45700" marB="45700">
+                    <a:solidFill>
+                      <a:srgbClr val="F5F3FF"/>
+                    </a:solidFill>
+                    <a:lnL w="6350" cap="flat" cmpd="sng">
+                      <a:solidFill>
+                        <a:srgbClr val="E5E7EB"/>
+                      </a:solidFill>
+                    </a:lnL>
+                    <a:lnR w="6350" cap="flat" cmpd="sng">
+                      <a:solidFill>
+                        <a:srgbClr val="E5E7EB"/>
+                      </a:solidFill>
+                    </a:lnR>
+                    <a:lnT w="6350" cap="flat" cmpd="sng">
+                      <a:solidFill>
+                        <a:srgbClr val="E5E7EB"/>
+                      </a:solidFill>
+                    </a:lnT>
+                    <a:lnB w="6350" cap="flat" cmpd="sng">
+                      <a:solidFill>
+                        <a:srgbClr val="E5E7EB"/>
+                      </a:solidFill>
+                    </a:lnB>
+                  </a:tcPr>
+                </a:tc>
+                <a:tc>
+                  <a:txBody>
+                    <a:bodyPr/>
+                    <a:lstStyle/>
+                    <a:p>
+                      <a:pPr algn="ctr"/>
+                      <a:r>
+                        <a:rPr sz="800">
+                          <a:latin typeface="Segoe UI"/>
+                        </a:rPr>
+                        <a:t>18.9%</a:t>
                       </a:r>
                     </a:p>
                   </a:txBody>
@@ -4866,7 +4866,7 @@
                         <a:rPr sz="800">
                           <a:latin typeface="Segoe UI"/>
                         </a:rPr>
-                        <a:t>103</a:t>
+                        <a:t>102</a:t>
                       </a:r>
                     </a:p>
                   </a:txBody>
@@ -4906,7 +4906,7 @@
                           </a:solidFill>
                           <a:latin typeface="Segoe UI"/>
                         </a:rPr>
-                        <a:t>72</a:t>
+                        <a:t>73</a:t>
                       </a:r>
                     </a:p>
                   </a:txBody>
@@ -4983,7 +4983,7 @@
                           </a:solidFill>
                           <a:latin typeface="Segoe UI"/>
                         </a:rPr>
-                        <a:t>36</a:t>
+                        <a:t>38</a:t>
                       </a:r>
                     </a:p>
                   </a:txBody>
@@ -5020,7 +5020,7 @@
                         <a:rPr sz="800">
                           <a:latin typeface="Segoe UI"/>
                         </a:rPr>
-                        <a:t>113</a:t>
+                        <a:t>114</a:t>
                       </a:r>
                     </a:p>
                   </a:txBody>
@@ -5262,7 +5262,7 @@
                           </a:solidFill>
                           <a:latin typeface="Segoe UI"/>
                         </a:rPr>
-                        <a:t>$650.4K</a:t>
+                        <a:t>$687.1K</a:t>
                       </a:r>
                     </a:p>
                   </a:txBody>

--- a/generated/Tier 1 Broker Scorecards/American Fleet Insurance_Broker_Scorecard.pptx
+++ b/generated/Tier 1 Broker Scorecards/American Fleet Insurance_Broker_Scorecard.pptx
@@ -3394,7 +3394,7 @@
                         <a:rPr sz="900">
                           <a:latin typeface="Segoe UI"/>
                         </a:rPr>
-                        <a:t>Tier 1  |  7.81% / 15.00%</a:t>
+                        <a:t>Tier 1  |  7.77% / 15.00%</a:t>
                       </a:r>
                     </a:p>
                   </a:txBody>
@@ -3690,7 +3690,7 @@
                         <a:rPr sz="900">
                           <a:latin typeface="Segoe UI"/>
                         </a:rPr>
-                        <a:t>Fleet Bound Premium: $376,183.44</a:t>
+                        <a:t>Fleet Bound Premium: $372,194.35</a:t>
                       </a:r>
                     </a:p>
                   </a:txBody>
@@ -3727,7 +3727,7 @@
                         <a:rPr sz="900">
                           <a:latin typeface="Segoe UI"/>
                         </a:rPr>
-                        <a:t>Fleet Book %: 10.1%</a:t>
+                        <a:t>Fleet Book %: 9.9%</a:t>
                       </a:r>
                     </a:p>
                   </a:txBody>
@@ -3766,7 +3766,7 @@
                         <a:rPr sz="900">
                           <a:latin typeface="Segoe UI"/>
                         </a:rPr>
-                        <a:t>Non-Fleet Subs: 2399  |  Binds: 189</a:t>
+                        <a:t>Non-Fleet Subs: 2425  |  Binds: 190</a:t>
                       </a:r>
                     </a:p>
                   </a:txBody>
@@ -3803,7 +3803,7 @@
                         <a:rPr sz="900">
                           <a:latin typeface="Segoe UI"/>
                         </a:rPr>
-                        <a:t>Non-Fleet Bound Premium: $3,365,698.68</a:t>
+                        <a:t>Non-Fleet Bound Premium: $3,369,687.77</a:t>
                       </a:r>
                     </a:p>
                   </a:txBody>
@@ -3840,7 +3840,7 @@
                         <a:rPr sz="900">
                           <a:latin typeface="Segoe UI"/>
                         </a:rPr>
-                        <a:t>Non-Fleet Book %: 89.9%</a:t>
+                        <a:t>Non-Fleet Book %: 90.1%</a:t>
                       </a:r>
                     </a:p>
                   </a:txBody>
@@ -4428,7 +4428,7 @@
                           </a:solidFill>
                           <a:latin typeface="Segoe UI"/>
                         </a:rPr>
-                        <a:t>351</a:t>
+                        <a:t>379</a:t>
                       </a:r>
                     </a:p>
                   </a:txBody>
@@ -4465,7 +4465,7 @@
                         <a:rPr sz="800">
                           <a:latin typeface="Segoe UI"/>
                         </a:rPr>
-                        <a:t>603</a:t>
+                        <a:t>604</a:t>
                       </a:r>
                     </a:p>
                   </a:txBody>
@@ -4581,7 +4581,7 @@
                         <a:rPr sz="800">
                           <a:latin typeface="Segoe UI"/>
                         </a:rPr>
-                        <a:t>13.1%</a:t>
+                        <a:t>13.0%</a:t>
                       </a:r>
                     </a:p>
                   </a:txBody>
@@ -4624,7 +4624,7 @@
                           </a:solidFill>
                           <a:latin typeface="Segoe UI"/>
                         </a:rPr>
-                        <a:t>11.1%</a:t>
+                        <a:t>10.9%</a:t>
                       </a:r>
                     </a:p>
                   </a:txBody>
@@ -4707,7 +4707,7 @@
                           </a:solidFill>
                           <a:latin typeface="Segoe UI"/>
                         </a:rPr>
-                        <a:t>10.8%</a:t>
+                        <a:t>10.3%</a:t>
                       </a:r>
                     </a:p>
                   </a:txBody>
@@ -4747,7 +4747,7 @@
                         <a:rPr sz="800">
                           <a:latin typeface="Segoe UI"/>
                         </a:rPr>
-                        <a:t>18.9%</a:t>
+                        <a:t>19.0%</a:t>
                       </a:r>
                     </a:p>
                   </a:txBody>
@@ -4866,7 +4866,7 @@
                         <a:rPr sz="800">
                           <a:latin typeface="Segoe UI"/>
                         </a:rPr>
-                        <a:t>102</a:t>
+                        <a:t>101</a:t>
                       </a:r>
                     </a:p>
                   </a:txBody>
@@ -4906,7 +4906,7 @@
                           </a:solidFill>
                           <a:latin typeface="Segoe UI"/>
                         </a:rPr>
-                        <a:t>73</a:t>
+                        <a:t>72</a:t>
                       </a:r>
                     </a:p>
                   </a:txBody>
@@ -4983,7 +4983,7 @@
                           </a:solidFill>
                           <a:latin typeface="Segoe UI"/>
                         </a:rPr>
-                        <a:t>38</a:t>
+                        <a:t>39</a:t>
                       </a:r>
                     </a:p>
                   </a:txBody>
@@ -5020,7 +5020,7 @@
                         <a:rPr sz="800">
                           <a:latin typeface="Segoe UI"/>
                         </a:rPr>
-                        <a:t>114</a:t>
+                        <a:t>115</a:t>
                       </a:r>
                     </a:p>
                   </a:txBody>

--- a/generated/Tier 1 Broker Scorecards/American Fleet Insurance_Broker_Scorecard.pptx
+++ b/generated/Tier 1 Broker Scorecards/American Fleet Insurance_Broker_Scorecard.pptx
@@ -3357,7 +3357,7 @@
                         <a:rPr sz="800">
                           <a:latin typeface="Segoe UI"/>
                         </a:rPr>
-                        <a:t>$10,036,377.54 / $10,941,034.30 / $3,741,882.12</a:t>
+                        <a:t>$10,036,377.54 / $11,118,666.48 / $3,919,514.30</a:t>
                       </a:r>
                     </a:p>
                   </a:txBody>
@@ -3394,7 +3394,7 @@
                         <a:rPr sz="900">
                           <a:latin typeface="Segoe UI"/>
                         </a:rPr>
-                        <a:t>Tier 1  |  7.77% / 15.00%</a:t>
+                        <a:t>Tier 1  |  7.88% / 15.00%</a:t>
                       </a:r>
                     </a:p>
                   </a:txBody>
@@ -3431,7 +3431,7 @@
                         <a:rPr sz="900">
                           <a:latin typeface="Segoe UI"/>
                         </a:rPr>
-                        <a:t>$14,050,928.56  (26.6% achieved)</a:t>
+                        <a:t>$14,050,928.56  (27.9% achieved)</a:t>
                       </a:r>
                     </a:p>
                   </a:txBody>
@@ -3690,7 +3690,7 @@
                         <a:rPr sz="900">
                           <a:latin typeface="Segoe UI"/>
                         </a:rPr>
-                        <a:t>Fleet Bound Premium: $372,194.35</a:t>
+                        <a:t>Fleet Bound Premium: $369,992.90</a:t>
                       </a:r>
                     </a:p>
                   </a:txBody>
@@ -3727,7 +3727,7 @@
                         <a:rPr sz="900">
                           <a:latin typeface="Segoe UI"/>
                         </a:rPr>
-                        <a:t>Fleet Book %: 9.9%</a:t>
+                        <a:t>Fleet Book %: 9.4%</a:t>
                       </a:r>
                     </a:p>
                   </a:txBody>
@@ -3766,7 +3766,7 @@
                         <a:rPr sz="900">
                           <a:latin typeface="Segoe UI"/>
                         </a:rPr>
-                        <a:t>Non-Fleet Subs: 2425  |  Binds: 190</a:t>
+                        <a:t>Non-Fleet Subs: 2453  |  Binds: 195</a:t>
                       </a:r>
                     </a:p>
                   </a:txBody>
@@ -3803,7 +3803,7 @@
                         <a:rPr sz="900">
                           <a:latin typeface="Segoe UI"/>
                         </a:rPr>
-                        <a:t>Non-Fleet Bound Premium: $3,369,687.77</a:t>
+                        <a:t>Non-Fleet Bound Premium: $3,549,521.40</a:t>
                       </a:r>
                     </a:p>
                   </a:txBody>
@@ -3840,7 +3840,7 @@
                         <a:rPr sz="900">
                           <a:latin typeface="Segoe UI"/>
                         </a:rPr>
-                        <a:t>Non-Fleet Book %: 90.1%</a:t>
+                        <a:t>Non-Fleet Book %: 90.6%</a:t>
                       </a:r>
                     </a:p>
                   </a:txBody>
@@ -4428,7 +4428,7 @@
                           </a:solidFill>
                           <a:latin typeface="Segoe UI"/>
                         </a:rPr>
-                        <a:t>379</a:t>
+                        <a:t>410</a:t>
                       </a:r>
                     </a:p>
                   </a:txBody>
@@ -4465,7 +4465,7 @@
                         <a:rPr sz="800">
                           <a:latin typeface="Segoe UI"/>
                         </a:rPr>
-                        <a:t>604</a:t>
+                        <a:t>605</a:t>
                       </a:r>
                     </a:p>
                   </a:txBody>
@@ -4624,7 +4624,7 @@
                           </a:solidFill>
                           <a:latin typeface="Segoe UI"/>
                         </a:rPr>
-                        <a:t>10.9%</a:t>
+                        <a:t>11.1%</a:t>
                       </a:r>
                     </a:p>
                   </a:txBody>
@@ -4664,7 +4664,7 @@
                         <a:rPr sz="800">
                           <a:latin typeface="Segoe UI"/>
                         </a:rPr>
-                        <a:t>18.1%</a:t>
+                        <a:t>18.3%</a:t>
                       </a:r>
                     </a:p>
                   </a:txBody>
@@ -4707,7 +4707,7 @@
                           </a:solidFill>
                           <a:latin typeface="Segoe UI"/>
                         </a:rPr>
-                        <a:t>10.3%</a:t>
+                        <a:t>10.2%</a:t>
                       </a:r>
                     </a:p>
                   </a:txBody>
@@ -4906,7 +4906,7 @@
                           </a:solidFill>
                           <a:latin typeface="Segoe UI"/>
                         </a:rPr>
-                        <a:t>72</a:t>
+                        <a:t>73</a:t>
                       </a:r>
                     </a:p>
                   </a:txBody>
@@ -4943,7 +4943,7 @@
                         <a:rPr sz="800">
                           <a:latin typeface="Segoe UI"/>
                         </a:rPr>
-                        <a:t>107</a:t>
+                        <a:t>108</a:t>
                       </a:r>
                     </a:p>
                   </a:txBody>
@@ -4983,7 +4983,7 @@
                           </a:solidFill>
                           <a:latin typeface="Segoe UI"/>
                         </a:rPr>
-                        <a:t>39</a:t>
+                        <a:t>42</a:t>
                       </a:r>
                     </a:p>
                   </a:txBody>
@@ -5262,7 +5262,7 @@
                           </a:solidFill>
                           <a:latin typeface="Segoe UI"/>
                         </a:rPr>
-                        <a:t>$687.1K</a:t>
+                        <a:t>$864.7K</a:t>
                       </a:r>
                     </a:p>
                   </a:txBody>

--- a/generated/Tier 1 Broker Scorecards/American Fleet Insurance_Broker_Scorecard.pptx
+++ b/generated/Tier 1 Broker Scorecards/American Fleet Insurance_Broker_Scorecard.pptx
@@ -3357,7 +3357,7 @@
                         <a:rPr sz="800">
                           <a:latin typeface="Segoe UI"/>
                         </a:rPr>
-                        <a:t>$10,036,377.54 / $11,118,666.48 / $3,919,514.30</a:t>
+                        <a:t>$10,036,377.54 / $11,168,638.07 / $3,969,485.89</a:t>
                       </a:r>
                     </a:p>
                   </a:txBody>
@@ -3394,7 +3394,7 @@
                         <a:rPr sz="900">
                           <a:latin typeface="Segoe UI"/>
                         </a:rPr>
-                        <a:t>Tier 1  |  7.88% / 15.00%</a:t>
+                        <a:t>Tier 1  |  7.75% / 15.00%</a:t>
                       </a:r>
                     </a:p>
                   </a:txBody>
@@ -3431,7 +3431,7 @@
                         <a:rPr sz="900">
                           <a:latin typeface="Segoe UI"/>
                         </a:rPr>
-                        <a:t>$14,050,928.56  (27.9% achieved)</a:t>
+                        <a:t>$14,050,928.56  (28.3% achieved)</a:t>
                       </a:r>
                     </a:p>
                   </a:txBody>
@@ -3653,7 +3653,7 @@
                         <a:rPr sz="900">
                           <a:latin typeface="Segoe UI"/>
                         </a:rPr>
-                        <a:t>Fleet Subs: 122  |  Binds: 8</a:t>
+                        <a:t>Fleet Subs: 124  |  Binds: 8</a:t>
                       </a:r>
                     </a:p>
                   </a:txBody>
@@ -3690,7 +3690,7 @@
                         <a:rPr sz="900">
                           <a:latin typeface="Segoe UI"/>
                         </a:rPr>
-                        <a:t>Fleet Bound Premium: $369,992.90</a:t>
+                        <a:t>Fleet Bound Premium: $380,868.27</a:t>
                       </a:r>
                     </a:p>
                   </a:txBody>
@@ -3727,7 +3727,7 @@
                         <a:rPr sz="900">
                           <a:latin typeface="Segoe UI"/>
                         </a:rPr>
-                        <a:t>Fleet Book %: 9.4%</a:t>
+                        <a:t>Fleet Book %: 9.6%</a:t>
                       </a:r>
                     </a:p>
                   </a:txBody>
@@ -3766,7 +3766,7 @@
                         <a:rPr sz="900">
                           <a:latin typeface="Segoe UI"/>
                         </a:rPr>
-                        <a:t>Non-Fleet Subs: 2453  |  Binds: 195</a:t>
+                        <a:t>Non-Fleet Subs: 2471  |  Binds: 193</a:t>
                       </a:r>
                     </a:p>
                   </a:txBody>
@@ -3803,7 +3803,7 @@
                         <a:rPr sz="900">
                           <a:latin typeface="Segoe UI"/>
                         </a:rPr>
-                        <a:t>Non-Fleet Bound Premium: $3,549,521.40</a:t>
+                        <a:t>Non-Fleet Bound Premium: $3,588,617.62</a:t>
                       </a:r>
                     </a:p>
                   </a:txBody>
@@ -3840,7 +3840,7 @@
                         <a:rPr sz="900">
                           <a:latin typeface="Segoe UI"/>
                         </a:rPr>
-                        <a:t>Non-Fleet Book %: 90.6%</a:t>
+                        <a:t>Non-Fleet Book %: 90.4%</a:t>
                       </a:r>
                     </a:p>
                   </a:txBody>
@@ -4428,7 +4428,7 @@
                           </a:solidFill>
                           <a:latin typeface="Segoe UI"/>
                         </a:rPr>
-                        <a:t>410</a:t>
+                        <a:t>432</a:t>
                       </a:r>
                     </a:p>
                   </a:txBody>
@@ -4465,7 +4465,7 @@
                         <a:rPr sz="800">
                           <a:latin typeface="Segoe UI"/>
                         </a:rPr>
-                        <a:t>605</a:t>
+                        <a:t>603</a:t>
                       </a:r>
                     </a:p>
                   </a:txBody>
@@ -4581,7 +4581,7 @@
                         <a:rPr sz="800">
                           <a:latin typeface="Segoe UI"/>
                         </a:rPr>
-                        <a:t>13.0%</a:t>
+                        <a:t>13.1%</a:t>
                       </a:r>
                     </a:p>
                   </a:txBody>
@@ -4624,7 +4624,7 @@
                           </a:solidFill>
                           <a:latin typeface="Segoe UI"/>
                         </a:rPr>
-                        <a:t>11.1%</a:t>
+                        <a:t>10.9%</a:t>
                       </a:r>
                     </a:p>
                   </a:txBody>
@@ -4707,7 +4707,7 @@
                           </a:solidFill>
                           <a:latin typeface="Segoe UI"/>
                         </a:rPr>
-                        <a:t>10.2%</a:t>
+                        <a:t>9.7%</a:t>
                       </a:r>
                     </a:p>
                   </a:txBody>
@@ -4747,7 +4747,7 @@
                         <a:rPr sz="800">
                           <a:latin typeface="Segoe UI"/>
                         </a:rPr>
-                        <a:t>19.0%</a:t>
+                        <a:t>18.7%</a:t>
                       </a:r>
                     </a:p>
                   </a:txBody>
@@ -4866,7 +4866,7 @@
                         <a:rPr sz="800">
                           <a:latin typeface="Segoe UI"/>
                         </a:rPr>
-                        <a:t>101</a:t>
+                        <a:t>102</a:t>
                       </a:r>
                     </a:p>
                   </a:txBody>
@@ -4906,7 +4906,7 @@
                           </a:solidFill>
                           <a:latin typeface="Segoe UI"/>
                         </a:rPr>
-                        <a:t>73</a:t>
+                        <a:t>72</a:t>
                       </a:r>
                     </a:p>
                   </a:txBody>
@@ -5020,7 +5020,7 @@
                         <a:rPr sz="800">
                           <a:latin typeface="Segoe UI"/>
                         </a:rPr>
-                        <a:t>115</a:t>
+                        <a:t>113</a:t>
                       </a:r>
                     </a:p>
                   </a:txBody>
@@ -5262,7 +5262,7 @@
                           </a:solidFill>
                           <a:latin typeface="Segoe UI"/>
                         </a:rPr>
-                        <a:t>$864.7K</a:t>
+                        <a:t>$914.7K</a:t>
                       </a:r>
                     </a:p>
                   </a:txBody>

--- a/generated/Tier 1 Broker Scorecards/American Fleet Insurance_Broker_Scorecard.pptx
+++ b/generated/Tier 1 Broker Scorecards/American Fleet Insurance_Broker_Scorecard.pptx
@@ -3357,7 +3357,7 @@
                         <a:rPr sz="800">
                           <a:latin typeface="Segoe UI"/>
                         </a:rPr>
-                        <a:t>$10,036,377.54 / $11,168,638.07 / $3,969,485.89</a:t>
+                        <a:t>$10,036,377.54 / $11,177,739.79 / $3,978,587.61</a:t>
                       </a:r>
                     </a:p>
                   </a:txBody>
@@ -3394,7 +3394,7 @@
                         <a:rPr sz="900">
                           <a:latin typeface="Segoe UI"/>
                         </a:rPr>
-                        <a:t>Tier 1  |  7.75% / 15.00%</a:t>
+                        <a:t>Tier 1  |  7.65% / 15.00%</a:t>
                       </a:r>
                     </a:p>
                   </a:txBody>
@@ -3653,7 +3653,7 @@
                         <a:rPr sz="900">
                           <a:latin typeface="Segoe UI"/>
                         </a:rPr>
-                        <a:t>Fleet Subs: 124  |  Binds: 8</a:t>
+                        <a:t>Fleet Subs: 125  |  Binds: 8</a:t>
                       </a:r>
                     </a:p>
                   </a:txBody>
@@ -3690,7 +3690,7 @@
                         <a:rPr sz="900">
                           <a:latin typeface="Segoe UI"/>
                         </a:rPr>
-                        <a:t>Fleet Bound Premium: $380,868.27</a:t>
+                        <a:t>Fleet Bound Premium: $384,558.56</a:t>
                       </a:r>
                     </a:p>
                   </a:txBody>
@@ -3727,7 +3727,7 @@
                         <a:rPr sz="900">
                           <a:latin typeface="Segoe UI"/>
                         </a:rPr>
-                        <a:t>Fleet Book %: 9.6%</a:t>
+                        <a:t>Fleet Book %: 9.7%</a:t>
                       </a:r>
                     </a:p>
                   </a:txBody>
@@ -3766,7 +3766,7 @@
                         <a:rPr sz="900">
                           <a:latin typeface="Segoe UI"/>
                         </a:rPr>
-                        <a:t>Non-Fleet Subs: 2471  |  Binds: 193</a:t>
+                        <a:t>Non-Fleet Subs: 2478  |  Binds: 191</a:t>
                       </a:r>
                     </a:p>
                   </a:txBody>
@@ -3803,7 +3803,7 @@
                         <a:rPr sz="900">
                           <a:latin typeface="Segoe UI"/>
                         </a:rPr>
-                        <a:t>Non-Fleet Bound Premium: $3,588,617.62</a:t>
+                        <a:t>Non-Fleet Bound Premium: $3,594,029.05</a:t>
                       </a:r>
                     </a:p>
                   </a:txBody>
@@ -3840,7 +3840,7 @@
                         <a:rPr sz="900">
                           <a:latin typeface="Segoe UI"/>
                         </a:rPr>
-                        <a:t>Non-Fleet Book %: 90.4%</a:t>
+                        <a:t>Non-Fleet Book %: 90.3%</a:t>
                       </a:r>
                     </a:p>
                   </a:txBody>
@@ -4311,7 +4311,7 @@
                         <a:rPr sz="800">
                           <a:latin typeface="Segoe UI"/>
                         </a:rPr>
-                        <a:t>776</a:t>
+                        <a:t>777</a:t>
                       </a:r>
                     </a:p>
                   </a:txBody>
@@ -4428,7 +4428,7 @@
                           </a:solidFill>
                           <a:latin typeface="Segoe UI"/>
                         </a:rPr>
-                        <a:t>432</a:t>
+                        <a:t>442</a:t>
                       </a:r>
                     </a:p>
                   </a:txBody>
@@ -4465,7 +4465,7 @@
                         <a:rPr sz="800">
                           <a:latin typeface="Segoe UI"/>
                         </a:rPr>
-                        <a:t>603</a:t>
+                        <a:t>604</a:t>
                       </a:r>
                     </a:p>
                   </a:txBody>
@@ -4624,7 +4624,7 @@
                           </a:solidFill>
                           <a:latin typeface="Segoe UI"/>
                         </a:rPr>
-                        <a:t>10.9%</a:t>
+                        <a:t>11.1%</a:t>
                       </a:r>
                     </a:p>
                   </a:txBody>
@@ -4664,7 +4664,7 @@
                         <a:rPr sz="800">
                           <a:latin typeface="Segoe UI"/>
                         </a:rPr>
-                        <a:t>18.3%</a:t>
+                        <a:t>18.5%</a:t>
                       </a:r>
                     </a:p>
                   </a:txBody>
@@ -4707,7 +4707,7 @@
                           </a:solidFill>
                           <a:latin typeface="Segoe UI"/>
                         </a:rPr>
-                        <a:t>9.7%</a:t>
+                        <a:t>9.5%</a:t>
                       </a:r>
                     </a:p>
                   </a:txBody>
@@ -4747,7 +4747,7 @@
                         <a:rPr sz="800">
                           <a:latin typeface="Segoe UI"/>
                         </a:rPr>
-                        <a:t>18.7%</a:t>
+                        <a:t>18.9%</a:t>
                       </a:r>
                     </a:p>
                   </a:txBody>
@@ -4906,7 +4906,7 @@
                           </a:solidFill>
                           <a:latin typeface="Segoe UI"/>
                         </a:rPr>
-                        <a:t>72</a:t>
+                        <a:t>73</a:t>
                       </a:r>
                     </a:p>
                   </a:txBody>
@@ -4943,7 +4943,7 @@
                         <a:rPr sz="800">
                           <a:latin typeface="Segoe UI"/>
                         </a:rPr>
-                        <a:t>108</a:t>
+                        <a:t>109</a:t>
                       </a:r>
                     </a:p>
                   </a:txBody>
@@ -5020,7 +5020,7 @@
                         <a:rPr sz="800">
                           <a:latin typeface="Segoe UI"/>
                         </a:rPr>
-                        <a:t>113</a:t>
+                        <a:t>114</a:t>
                       </a:r>
                     </a:p>
                   </a:txBody>
@@ -5262,7 +5262,7 @@
                           </a:solidFill>
                           <a:latin typeface="Segoe UI"/>
                         </a:rPr>
-                        <a:t>$914.7K</a:t>
+                        <a:t>$923.8K</a:t>
                       </a:r>
                     </a:p>
                   </a:txBody>

--- a/generated/Tier 1 Broker Scorecards/American Fleet Insurance_Broker_Scorecard.pptx
+++ b/generated/Tier 1 Broker Scorecards/American Fleet Insurance_Broker_Scorecard.pptx
@@ -3394,7 +3394,7 @@
                         <a:rPr sz="900">
                           <a:latin typeface="Segoe UI"/>
                         </a:rPr>
-                        <a:t>Tier 1  |  7.65% / 15.00%</a:t>
+                        <a:t>Tier 1  |  7.63% / 15.00%</a:t>
                       </a:r>
                     </a:p>
                   </a:txBody>
@@ -3766,7 +3766,7 @@
                         <a:rPr sz="900">
                           <a:latin typeface="Segoe UI"/>
                         </a:rPr>
-                        <a:t>Non-Fleet Subs: 2478  |  Binds: 191</a:t>
+                        <a:t>Non-Fleet Subs: 2482  |  Binds: 191</a:t>
                       </a:r>
                     </a:p>
                   </a:txBody>
@@ -4311,7 +4311,7 @@
                         <a:rPr sz="800">
                           <a:latin typeface="Segoe UI"/>
                         </a:rPr>
-                        <a:t>777</a:t>
+                        <a:t>776</a:t>
                       </a:r>
                     </a:p>
                   </a:txBody>
@@ -4428,7 +4428,7 @@
                           </a:solidFill>
                           <a:latin typeface="Segoe UI"/>
                         </a:rPr>
-                        <a:t>442</a:t>
+                        <a:t>446</a:t>
                       </a:r>
                     </a:p>
                   </a:txBody>
@@ -4664,7 +4664,7 @@
                         <a:rPr sz="800">
                           <a:latin typeface="Segoe UI"/>
                         </a:rPr>
-                        <a:t>18.5%</a:t>
+                        <a:t>18.3%</a:t>
                       </a:r>
                     </a:p>
                   </a:txBody>
@@ -4707,7 +4707,7 @@
                           </a:solidFill>
                           <a:latin typeface="Segoe UI"/>
                         </a:rPr>
-                        <a:t>9.5%</a:t>
+                        <a:t>9.4%</a:t>
                       </a:r>
                     </a:p>
                   </a:txBody>
@@ -4747,7 +4747,7 @@
                         <a:rPr sz="800">
                           <a:latin typeface="Segoe UI"/>
                         </a:rPr>
-                        <a:t>18.9%</a:t>
+                        <a:t>18.7%</a:t>
                       </a:r>
                     </a:p>
                   </a:txBody>
@@ -4943,7 +4943,7 @@
                         <a:rPr sz="800">
                           <a:latin typeface="Segoe UI"/>
                         </a:rPr>
-                        <a:t>109</a:t>
+                        <a:t>108</a:t>
                       </a:r>
                     </a:p>
                   </a:txBody>
@@ -5020,7 +5020,7 @@
                         <a:rPr sz="800">
                           <a:latin typeface="Segoe UI"/>
                         </a:rPr>
-                        <a:t>114</a:t>
+                        <a:t>113</a:t>
                       </a:r>
                     </a:p>
                   </a:txBody>

--- a/generated/Tier 1 Broker Scorecards/American Fleet Insurance_Broker_Scorecard.pptx
+++ b/generated/Tier 1 Broker Scorecards/American Fleet Insurance_Broker_Scorecard.pptx
@@ -3357,7 +3357,7 @@
                         <a:rPr sz="800">
                           <a:latin typeface="Segoe UI"/>
                         </a:rPr>
-                        <a:t>$10,036,377.54 / $11,177,739.79 / $3,978,587.61</a:t>
+                        <a:t>$10,036,377.54 / $11,179,396.98 / $3,980,244.80</a:t>
                       </a:r>
                     </a:p>
                   </a:txBody>
@@ -3394,7 +3394,7 @@
                         <a:rPr sz="900">
                           <a:latin typeface="Segoe UI"/>
                         </a:rPr>
-                        <a:t>Tier 1  |  7.63% / 15.00%</a:t>
+                        <a:t>Tier 1  |  7.67% / 15.00%</a:t>
                       </a:r>
                     </a:p>
                   </a:txBody>
@@ -3690,7 +3690,7 @@
                         <a:rPr sz="900">
                           <a:latin typeface="Segoe UI"/>
                         </a:rPr>
-                        <a:t>Fleet Bound Premium: $384,558.56</a:t>
+                        <a:t>Fleet Bound Premium: $381,906.59</a:t>
                       </a:r>
                     </a:p>
                   </a:txBody>
@@ -3727,7 +3727,7 @@
                         <a:rPr sz="900">
                           <a:latin typeface="Segoe UI"/>
                         </a:rPr>
-                        <a:t>Fleet Book %: 9.7%</a:t>
+                        <a:t>Fleet Book %: 9.6%</a:t>
                       </a:r>
                     </a:p>
                   </a:txBody>
@@ -3766,7 +3766,7 @@
                         <a:rPr sz="900">
                           <a:latin typeface="Segoe UI"/>
                         </a:rPr>
-                        <a:t>Non-Fleet Subs: 2482  |  Binds: 191</a:t>
+                        <a:t>Non-Fleet Subs: 2484  |  Binds: 192</a:t>
                       </a:r>
                     </a:p>
                   </a:txBody>
@@ -3803,7 +3803,7 @@
                         <a:rPr sz="900">
                           <a:latin typeface="Segoe UI"/>
                         </a:rPr>
-                        <a:t>Non-Fleet Bound Premium: $3,594,029.05</a:t>
+                        <a:t>Non-Fleet Bound Premium: $3,598,338.21</a:t>
                       </a:r>
                     </a:p>
                   </a:txBody>
@@ -3840,7 +3840,7 @@
                         <a:rPr sz="900">
                           <a:latin typeface="Segoe UI"/>
                         </a:rPr>
-                        <a:t>Non-Fleet Book %: 90.3%</a:t>
+                        <a:t>Non-Fleet Book %: 90.4%</a:t>
                       </a:r>
                     </a:p>
                   </a:txBody>
@@ -4311,7 +4311,7 @@
                         <a:rPr sz="800">
                           <a:latin typeface="Segoe UI"/>
                         </a:rPr>
-                        <a:t>776</a:t>
+                        <a:t>777</a:t>
                       </a:r>
                     </a:p>
                   </a:txBody>
@@ -4428,7 +4428,7 @@
                           </a:solidFill>
                           <a:latin typeface="Segoe UI"/>
                         </a:rPr>
-                        <a:t>446</a:t>
+                        <a:t>448</a:t>
                       </a:r>
                     </a:p>
                   </a:txBody>
@@ -4465,7 +4465,7 @@
                         <a:rPr sz="800">
                           <a:latin typeface="Segoe UI"/>
                         </a:rPr>
-                        <a:t>604</a:t>
+                        <a:t>603</a:t>
                       </a:r>
                     </a:p>
                   </a:txBody>
@@ -4581,7 +4581,7 @@
                         <a:rPr sz="800">
                           <a:latin typeface="Segoe UI"/>
                         </a:rPr>
-                        <a:t>13.1%</a:t>
+                        <a:t>13.4%</a:t>
                       </a:r>
                     </a:p>
                   </a:txBody>
@@ -4624,7 +4624,7 @@
                           </a:solidFill>
                           <a:latin typeface="Segoe UI"/>
                         </a:rPr>
-                        <a:t>11.1%</a:t>
+                        <a:t>10.9%</a:t>
                       </a:r>
                     </a:p>
                   </a:txBody>
@@ -4664,7 +4664,7 @@
                         <a:rPr sz="800">
                           <a:latin typeface="Segoe UI"/>
                         </a:rPr>
-                        <a:t>18.3%</a:t>
+                        <a:t>18.1%</a:t>
                       </a:r>
                     </a:p>
                   </a:txBody>
@@ -4707,7 +4707,7 @@
                           </a:solidFill>
                           <a:latin typeface="Segoe UI"/>
                         </a:rPr>
-                        <a:t>9.4%</a:t>
+                        <a:t>9.6%</a:t>
                       </a:r>
                     </a:p>
                   </a:txBody>
@@ -4747,7 +4747,7 @@
                         <a:rPr sz="800">
                           <a:latin typeface="Segoe UI"/>
                         </a:rPr>
-                        <a:t>18.7%</a:t>
+                        <a:t>18.9%</a:t>
                       </a:r>
                     </a:p>
                   </a:txBody>
@@ -4866,7 +4866,7 @@
                         <a:rPr sz="800">
                           <a:latin typeface="Segoe UI"/>
                         </a:rPr>
-                        <a:t>102</a:t>
+                        <a:t>104</a:t>
                       </a:r>
                     </a:p>
                   </a:txBody>
@@ -4906,7 +4906,7 @@
                           </a:solidFill>
                           <a:latin typeface="Segoe UI"/>
                         </a:rPr>
-                        <a:t>73</a:t>
+                        <a:t>72</a:t>
                       </a:r>
                     </a:p>
                   </a:txBody>
@@ -4943,7 +4943,7 @@
                         <a:rPr sz="800">
                           <a:latin typeface="Segoe UI"/>
                         </a:rPr>
-                        <a:t>108</a:t>
+                        <a:t>107</a:t>
                       </a:r>
                     </a:p>
                   </a:txBody>
@@ -4983,7 +4983,7 @@
                           </a:solidFill>
                           <a:latin typeface="Segoe UI"/>
                         </a:rPr>
-                        <a:t>42</a:t>
+                        <a:t>43</a:t>
                       </a:r>
                     </a:p>
                   </a:txBody>
@@ -5020,7 +5020,7 @@
                         <a:rPr sz="800">
                           <a:latin typeface="Segoe UI"/>
                         </a:rPr>
-                        <a:t>113</a:t>
+                        <a:t>114</a:t>
                       </a:r>
                     </a:p>
                   </a:txBody>
@@ -5262,7 +5262,7 @@
                           </a:solidFill>
                           <a:latin typeface="Segoe UI"/>
                         </a:rPr>
-                        <a:t>$923.8K</a:t>
+                        <a:t>$925.4K</a:t>
                       </a:r>
                     </a:p>
                   </a:txBody>

--- a/generated/Tier 1 Broker Scorecards/American Fleet Insurance_Broker_Scorecard.pptx
+++ b/generated/Tier 1 Broker Scorecards/American Fleet Insurance_Broker_Scorecard.pptx
@@ -3394,7 +3394,7 @@
                         <a:rPr sz="900">
                           <a:latin typeface="Segoe UI"/>
                         </a:rPr>
-                        <a:t>Tier 1  |  7.67% / 15.00%</a:t>
+                        <a:t>Tier 1  |  7.59% / 15.00%</a:t>
                       </a:r>
                     </a:p>
                   </a:txBody>
@@ -3690,7 +3690,7 @@
                         <a:rPr sz="900">
                           <a:latin typeface="Segoe UI"/>
                         </a:rPr>
-                        <a:t>Fleet Bound Premium: $381,906.59</a:t>
+                        <a:t>Fleet Bound Premium: $387,073.71</a:t>
                       </a:r>
                     </a:p>
                   </a:txBody>
@@ -3727,7 +3727,7 @@
                         <a:rPr sz="900">
                           <a:latin typeface="Segoe UI"/>
                         </a:rPr>
-                        <a:t>Fleet Book %: 9.6%</a:t>
+                        <a:t>Fleet Book %: 9.7%</a:t>
                       </a:r>
                     </a:p>
                   </a:txBody>
@@ -3766,7 +3766,7 @@
                         <a:rPr sz="900">
                           <a:latin typeface="Segoe UI"/>
                         </a:rPr>
-                        <a:t>Non-Fleet Subs: 2484  |  Binds: 192</a:t>
+                        <a:t>Non-Fleet Subs: 2484  |  Binds: 190</a:t>
                       </a:r>
                     </a:p>
                   </a:txBody>
@@ -3803,7 +3803,7 @@
                         <a:rPr sz="900">
                           <a:latin typeface="Segoe UI"/>
                         </a:rPr>
-                        <a:t>Non-Fleet Bound Premium: $3,598,338.21</a:t>
+                        <a:t>Non-Fleet Bound Premium: $3,593,171.09</a:t>
                       </a:r>
                     </a:p>
                   </a:txBody>
@@ -3840,7 +3840,7 @@
                         <a:rPr sz="900">
                           <a:latin typeface="Segoe UI"/>
                         </a:rPr>
-                        <a:t>Non-Fleet Book %: 90.4%</a:t>
+                        <a:t>Non-Fleet Book %: 90.3%</a:t>
                       </a:r>
                     </a:p>
                   </a:txBody>
@@ -4311,7 +4311,7 @@
                         <a:rPr sz="800">
                           <a:latin typeface="Segoe UI"/>
                         </a:rPr>
-                        <a:t>777</a:t>
+                        <a:t>776</a:t>
                       </a:r>
                     </a:p>
                   </a:txBody>
@@ -4581,7 +4581,7 @@
                         <a:rPr sz="800">
                           <a:latin typeface="Segoe UI"/>
                         </a:rPr>
-                        <a:t>13.4%</a:t>
+                        <a:t>13.1%</a:t>
                       </a:r>
                     </a:p>
                   </a:txBody>
@@ -4624,7 +4624,7 @@
                           </a:solidFill>
                           <a:latin typeface="Segoe UI"/>
                         </a:rPr>
-                        <a:t>10.9%</a:t>
+                        <a:t>10.8%</a:t>
                       </a:r>
                     </a:p>
                   </a:txBody>
@@ -4747,7 +4747,7 @@
                         <a:rPr sz="800">
                           <a:latin typeface="Segoe UI"/>
                         </a:rPr>
-                        <a:t>18.9%</a:t>
+                        <a:t>18.7%</a:t>
                       </a:r>
                     </a:p>
                   </a:txBody>
@@ -4866,7 +4866,7 @@
                         <a:rPr sz="800">
                           <a:latin typeface="Segoe UI"/>
                         </a:rPr>
-                        <a:t>104</a:t>
+                        <a:t>102</a:t>
                       </a:r>
                     </a:p>
                   </a:txBody>
@@ -4906,7 +4906,7 @@
                           </a:solidFill>
                           <a:latin typeface="Segoe UI"/>
                         </a:rPr>
-                        <a:t>72</a:t>
+                        <a:t>71</a:t>
                       </a:r>
                     </a:p>
                   </a:txBody>
@@ -5020,7 +5020,7 @@
                         <a:rPr sz="800">
                           <a:latin typeface="Segoe UI"/>
                         </a:rPr>
-                        <a:t>114</a:t>
+                        <a:t>113</a:t>
                       </a:r>
                     </a:p>
                   </a:txBody>

--- a/generated/Tier 1 Broker Scorecards/American Fleet Insurance_Broker_Scorecard.pptx
+++ b/generated/Tier 1 Broker Scorecards/American Fleet Insurance_Broker_Scorecard.pptx
@@ -3357,7 +3357,7 @@
                         <a:rPr sz="800">
                           <a:latin typeface="Segoe UI"/>
                         </a:rPr>
-                        <a:t>$10,036,377.54 / $11,179,396.98 / $3,980,244.80</a:t>
+                        <a:t>$10,036,377.54 / $11,250,603.52 / $4,051,451.34</a:t>
                       </a:r>
                     </a:p>
                   </a:txBody>
@@ -3394,7 +3394,7 @@
                         <a:rPr sz="900">
                           <a:latin typeface="Segoe UI"/>
                         </a:rPr>
-                        <a:t>Tier 1  |  7.59% / 15.00%</a:t>
+                        <a:t>Tier 1  |  7.53% / 15.00%</a:t>
                       </a:r>
                     </a:p>
                   </a:txBody>
@@ -3431,7 +3431,7 @@
                         <a:rPr sz="900">
                           <a:latin typeface="Segoe UI"/>
                         </a:rPr>
-                        <a:t>$14,050,928.56  (28.3% achieved)</a:t>
+                        <a:t>$14,050,928.56  (28.8% achieved)</a:t>
                       </a:r>
                     </a:p>
                   </a:txBody>
@@ -3653,7 +3653,7 @@
                         <a:rPr sz="900">
                           <a:latin typeface="Segoe UI"/>
                         </a:rPr>
-                        <a:t>Fleet Subs: 125  |  Binds: 8</a:t>
+                        <a:t>Fleet Subs: 127  |  Binds: 8</a:t>
                       </a:r>
                     </a:p>
                   </a:txBody>
@@ -3690,7 +3690,7 @@
                         <a:rPr sz="900">
                           <a:latin typeface="Segoe UI"/>
                         </a:rPr>
-                        <a:t>Fleet Bound Premium: $387,073.71</a:t>
+                        <a:t>Fleet Bound Premium: $397,618.11</a:t>
                       </a:r>
                     </a:p>
                   </a:txBody>
@@ -3727,7 +3727,7 @@
                         <a:rPr sz="900">
                           <a:latin typeface="Segoe UI"/>
                         </a:rPr>
-                        <a:t>Fleet Book %: 9.7%</a:t>
+                        <a:t>Fleet Book %: 9.8%</a:t>
                       </a:r>
                     </a:p>
                   </a:txBody>
@@ -3766,7 +3766,7 @@
                         <a:rPr sz="900">
                           <a:latin typeface="Segoe UI"/>
                         </a:rPr>
-                        <a:t>Non-Fleet Subs: 2484  |  Binds: 190</a:t>
+                        <a:t>Non-Fleet Subs: 2501  |  Binds: 190</a:t>
                       </a:r>
                     </a:p>
                   </a:txBody>
@@ -3803,7 +3803,7 @@
                         <a:rPr sz="900">
                           <a:latin typeface="Segoe UI"/>
                         </a:rPr>
-                        <a:t>Non-Fleet Bound Premium: $3,593,171.09</a:t>
+                        <a:t>Non-Fleet Bound Premium: $3,653,833.23</a:t>
                       </a:r>
                     </a:p>
                   </a:txBody>
@@ -3840,7 +3840,7 @@
                         <a:rPr sz="900">
                           <a:latin typeface="Segoe UI"/>
                         </a:rPr>
-                        <a:t>Non-Fleet Book %: 90.3%</a:t>
+                        <a:t>Non-Fleet Book %: 90.2%</a:t>
                       </a:r>
                     </a:p>
                   </a:txBody>
@@ -4428,7 +4428,7 @@
                           </a:solidFill>
                           <a:latin typeface="Segoe UI"/>
                         </a:rPr>
-                        <a:t>448</a:t>
+                        <a:t>470</a:t>
                       </a:r>
                     </a:p>
                   </a:txBody>
@@ -4465,7 +4465,7 @@
                         <a:rPr sz="800">
                           <a:latin typeface="Segoe UI"/>
                         </a:rPr>
-                        <a:t>603</a:t>
+                        <a:t>604</a:t>
                       </a:r>
                     </a:p>
                   </a:txBody>
@@ -4581,7 +4581,7 @@
                         <a:rPr sz="800">
                           <a:latin typeface="Segoe UI"/>
                         </a:rPr>
-                        <a:t>13.1%</a:t>
+                        <a:t>13.0%</a:t>
                       </a:r>
                     </a:p>
                   </a:txBody>
@@ -4624,7 +4624,7 @@
                           </a:solidFill>
                           <a:latin typeface="Segoe UI"/>
                         </a:rPr>
-                        <a:t>10.8%</a:t>
+                        <a:t>10.6%</a:t>
                       </a:r>
                     </a:p>
                   </a:txBody>
@@ -4664,7 +4664,7 @@
                         <a:rPr sz="800">
                           <a:latin typeface="Segoe UI"/>
                         </a:rPr>
-                        <a:t>18.1%</a:t>
+                        <a:t>18.3%</a:t>
                       </a:r>
                     </a:p>
                   </a:txBody>
@@ -4707,7 +4707,7 @@
                           </a:solidFill>
                           <a:latin typeface="Segoe UI"/>
                         </a:rPr>
-                        <a:t>9.6%</a:t>
+                        <a:t>10.0%</a:t>
                       </a:r>
                     </a:p>
                   </a:txBody>
@@ -4747,7 +4747,7 @@
                         <a:rPr sz="800">
                           <a:latin typeface="Segoe UI"/>
                         </a:rPr>
-                        <a:t>18.7%</a:t>
+                        <a:t>19.0%</a:t>
                       </a:r>
                     </a:p>
                   </a:txBody>
@@ -4866,7 +4866,7 @@
                         <a:rPr sz="800">
                           <a:latin typeface="Segoe UI"/>
                         </a:rPr>
-                        <a:t>102</a:t>
+                        <a:t>101</a:t>
                       </a:r>
                     </a:p>
                   </a:txBody>
@@ -4906,7 +4906,7 @@
                           </a:solidFill>
                           <a:latin typeface="Segoe UI"/>
                         </a:rPr>
-                        <a:t>71</a:t>
+                        <a:t>70</a:t>
                       </a:r>
                     </a:p>
                   </a:txBody>
@@ -4943,7 +4943,7 @@
                         <a:rPr sz="800">
                           <a:latin typeface="Segoe UI"/>
                         </a:rPr>
-                        <a:t>107</a:t>
+                        <a:t>108</a:t>
                       </a:r>
                     </a:p>
                   </a:txBody>
@@ -4983,7 +4983,7 @@
                           </a:solidFill>
                           <a:latin typeface="Segoe UI"/>
                         </a:rPr>
-                        <a:t>43</a:t>
+                        <a:t>47</a:t>
                       </a:r>
                     </a:p>
                   </a:txBody>
@@ -5020,7 +5020,7 @@
                         <a:rPr sz="800">
                           <a:latin typeface="Segoe UI"/>
                         </a:rPr>
-                        <a:t>113</a:t>
+                        <a:t>115</a:t>
                       </a:r>
                     </a:p>
                   </a:txBody>
@@ -5262,7 +5262,7 @@
                           </a:solidFill>
                           <a:latin typeface="Segoe UI"/>
                         </a:rPr>
-                        <a:t>$925.4K</a:t>
+                        <a:t>$996.6K</a:t>
                       </a:r>
                     </a:p>
                   </a:txBody>

--- a/generated/Tier 1 Broker Scorecards/American Fleet Insurance_Broker_Scorecard.pptx
+++ b/generated/Tier 1 Broker Scorecards/American Fleet Insurance_Broker_Scorecard.pptx
@@ -3357,7 +3357,7 @@
                         <a:rPr sz="800">
                           <a:latin typeface="Segoe UI"/>
                         </a:rPr>
-                        <a:t>$10,036,377.54 / $11,250,603.52 / $4,051,451.34</a:t>
+                        <a:t>$10,036,377.54 / $11,251,938.83 / $4,052,786.65</a:t>
                       </a:r>
                     </a:p>
                   </a:txBody>
@@ -3394,7 +3394,7 @@
                         <a:rPr sz="900">
                           <a:latin typeface="Segoe UI"/>
                         </a:rPr>
-                        <a:t>Tier 1  |  7.53% / 15.00%</a:t>
+                        <a:t>Tier 1  |  7.48% / 15.00%</a:t>
                       </a:r>
                     </a:p>
                   </a:txBody>
@@ -3653,7 +3653,7 @@
                         <a:rPr sz="900">
                           <a:latin typeface="Segoe UI"/>
                         </a:rPr>
-                        <a:t>Fleet Subs: 127  |  Binds: 8</a:t>
+                        <a:t>Fleet Subs: 132  |  Binds: 8</a:t>
                       </a:r>
                     </a:p>
                   </a:txBody>
@@ -3690,7 +3690,7 @@
                         <a:rPr sz="900">
                           <a:latin typeface="Segoe UI"/>
                         </a:rPr>
-                        <a:t>Fleet Bound Premium: $397,618.11</a:t>
+                        <a:t>Fleet Bound Premium: $398,869.47</a:t>
                       </a:r>
                     </a:p>
                   </a:txBody>
@@ -3766,7 +3766,7 @@
                         <a:rPr sz="900">
                           <a:latin typeface="Segoe UI"/>
                         </a:rPr>
-                        <a:t>Non-Fleet Subs: 2501  |  Binds: 190</a:t>
+                        <a:t>Non-Fleet Subs: 2527  |  Binds: 191</a:t>
                       </a:r>
                     </a:p>
                   </a:txBody>
@@ -3803,7 +3803,7 @@
                         <a:rPr sz="900">
                           <a:latin typeface="Segoe UI"/>
                         </a:rPr>
-                        <a:t>Non-Fleet Bound Premium: $3,653,833.23</a:t>
+                        <a:t>Non-Fleet Bound Premium: $3,653,917.18</a:t>
                       </a:r>
                     </a:p>
                   </a:txBody>
@@ -4351,7 +4351,7 @@
                           </a:solidFill>
                           <a:latin typeface="Segoe UI"/>
                         </a:rPr>
-                        <a:t>660</a:t>
+                        <a:t>659</a:t>
                       </a:r>
                     </a:p>
                   </a:txBody>
@@ -4428,7 +4428,7 @@
                           </a:solidFill>
                           <a:latin typeface="Segoe UI"/>
                         </a:rPr>
-                        <a:t>470</a:t>
+                        <a:t>504</a:t>
                       </a:r>
                     </a:p>
                   </a:txBody>
@@ -4581,7 +4581,7 @@
                         <a:rPr sz="800">
                           <a:latin typeface="Segoe UI"/>
                         </a:rPr>
-                        <a:t>13.0%</a:t>
+                        <a:t>13.3%</a:t>
                       </a:r>
                     </a:p>
                   </a:txBody>
@@ -4624,7 +4624,7 @@
                           </a:solidFill>
                           <a:latin typeface="Segoe UI"/>
                         </a:rPr>
-                        <a:t>10.6%</a:t>
+                        <a:t>10.9%</a:t>
                       </a:r>
                     </a:p>
                   </a:txBody>
@@ -4664,7 +4664,7 @@
                         <a:rPr sz="800">
                           <a:latin typeface="Segoe UI"/>
                         </a:rPr>
-                        <a:t>18.3%</a:t>
+                        <a:t>18.5%</a:t>
                       </a:r>
                     </a:p>
                   </a:txBody>
@@ -4707,7 +4707,7 @@
                           </a:solidFill>
                           <a:latin typeface="Segoe UI"/>
                         </a:rPr>
-                        <a:t>10.0%</a:t>
+                        <a:t>9.1%</a:t>
                       </a:r>
                     </a:p>
                   </a:txBody>
@@ -4747,7 +4747,7 @@
                         <a:rPr sz="800">
                           <a:latin typeface="Segoe UI"/>
                         </a:rPr>
-                        <a:t>19.0%</a:t>
+                        <a:t>18.9%</a:t>
                       </a:r>
                     </a:p>
                   </a:txBody>
@@ -4866,7 +4866,7 @@
                         <a:rPr sz="800">
                           <a:latin typeface="Segoe UI"/>
                         </a:rPr>
-                        <a:t>101</a:t>
+                        <a:t>103</a:t>
                       </a:r>
                     </a:p>
                   </a:txBody>
@@ -4906,7 +4906,7 @@
                           </a:solidFill>
                           <a:latin typeface="Segoe UI"/>
                         </a:rPr>
-                        <a:t>70</a:t>
+                        <a:t>72</a:t>
                       </a:r>
                     </a:p>
                   </a:txBody>
@@ -4943,7 +4943,7 @@
                         <a:rPr sz="800">
                           <a:latin typeface="Segoe UI"/>
                         </a:rPr>
-                        <a:t>108</a:t>
+                        <a:t>109</a:t>
                       </a:r>
                     </a:p>
                   </a:txBody>
@@ -4983,7 +4983,7 @@
                           </a:solidFill>
                           <a:latin typeface="Segoe UI"/>
                         </a:rPr>
-                        <a:t>47</a:t>
+                        <a:t>46</a:t>
                       </a:r>
                     </a:p>
                   </a:txBody>
@@ -5020,7 +5020,7 @@
                         <a:rPr sz="800">
                           <a:latin typeface="Segoe UI"/>
                         </a:rPr>
-                        <a:t>115</a:t>
+                        <a:t>114</a:t>
                       </a:r>
                     </a:p>
                   </a:txBody>
@@ -5262,7 +5262,7 @@
                           </a:solidFill>
                           <a:latin typeface="Segoe UI"/>
                         </a:rPr>
-                        <a:t>$996.6K</a:t>
+                        <a:t>$998.0K</a:t>
                       </a:r>
                     </a:p>
                   </a:txBody>

--- a/generated/Tier 1 Broker Scorecards/American Fleet Insurance_Broker_Scorecard.pptx
+++ b/generated/Tier 1 Broker Scorecards/American Fleet Insurance_Broker_Scorecard.pptx
@@ -3357,7 +3357,7 @@
                         <a:rPr sz="800">
                           <a:latin typeface="Segoe UI"/>
                         </a:rPr>
-                        <a:t>$10,036,377.54 / $11,251,938.83 / $4,052,786.65</a:t>
+                        <a:t>$10,036,377.54 / $11,252,964.33 / $4,053,812.15</a:t>
                       </a:r>
                     </a:p>
                   </a:txBody>
@@ -3394,7 +3394,7 @@
                         <a:rPr sz="900">
                           <a:latin typeface="Segoe UI"/>
                         </a:rPr>
-                        <a:t>Tier 1  |  7.48% / 15.00%</a:t>
+                        <a:t>Tier 1  |  7.56% / 15.00%</a:t>
                       </a:r>
                     </a:p>
                   </a:txBody>
@@ -3431,7 +3431,7 @@
                         <a:rPr sz="900">
                           <a:latin typeface="Segoe UI"/>
                         </a:rPr>
-                        <a:t>$14,050,928.56  (28.8% achieved)</a:t>
+                        <a:t>$14,050,928.56  (28.9% achieved)</a:t>
                       </a:r>
                     </a:p>
                   </a:txBody>
@@ -3690,7 +3690,7 @@
                         <a:rPr sz="900">
                           <a:latin typeface="Segoe UI"/>
                         </a:rPr>
-                        <a:t>Fleet Bound Premium: $398,869.47</a:t>
+                        <a:t>Fleet Bound Premium: $393,129.72</a:t>
                       </a:r>
                     </a:p>
                   </a:txBody>
@@ -3727,7 +3727,7 @@
                         <a:rPr sz="900">
                           <a:latin typeface="Segoe UI"/>
                         </a:rPr>
-                        <a:t>Fleet Book %: 9.8%</a:t>
+                        <a:t>Fleet Book %: 9.7%</a:t>
                       </a:r>
                     </a:p>
                   </a:txBody>
@@ -3766,7 +3766,7 @@
                         <a:rPr sz="900">
                           <a:latin typeface="Segoe UI"/>
                         </a:rPr>
-                        <a:t>Non-Fleet Subs: 2527  |  Binds: 191</a:t>
+                        <a:t>Non-Fleet Subs: 2554  |  Binds: 195</a:t>
                       </a:r>
                     </a:p>
                   </a:txBody>
@@ -3803,7 +3803,7 @@
                         <a:rPr sz="900">
                           <a:latin typeface="Segoe UI"/>
                         </a:rPr>
-                        <a:t>Non-Fleet Bound Premium: $3,653,917.18</a:t>
+                        <a:t>Non-Fleet Bound Premium: $3,660,682.43</a:t>
                       </a:r>
                     </a:p>
                   </a:txBody>
@@ -3840,7 +3840,7 @@
                         <a:rPr sz="900">
                           <a:latin typeface="Segoe UI"/>
                         </a:rPr>
-                        <a:t>Non-Fleet Book %: 90.2%</a:t>
+                        <a:t>Non-Fleet Book %: 90.3%</a:t>
                       </a:r>
                     </a:p>
                   </a:txBody>
@@ -4311,7 +4311,7 @@
                         <a:rPr sz="800">
                           <a:latin typeface="Segoe UI"/>
                         </a:rPr>
-                        <a:t>776</a:t>
+                        <a:t>777</a:t>
                       </a:r>
                     </a:p>
                   </a:txBody>
@@ -4428,7 +4428,7 @@
                           </a:solidFill>
                           <a:latin typeface="Segoe UI"/>
                         </a:rPr>
-                        <a:t>504</a:t>
+                        <a:t>534</a:t>
                       </a:r>
                     </a:p>
                   </a:txBody>
@@ -4581,7 +4581,7 @@
                         <a:rPr sz="800">
                           <a:latin typeface="Segoe UI"/>
                         </a:rPr>
-                        <a:t>13.3%</a:t>
+                        <a:t>13.4%</a:t>
                       </a:r>
                     </a:p>
                   </a:txBody>
@@ -4624,7 +4624,7 @@
                           </a:solidFill>
                           <a:latin typeface="Segoe UI"/>
                         </a:rPr>
-                        <a:t>10.9%</a:t>
+                        <a:t>10.8%</a:t>
                       </a:r>
                     </a:p>
                   </a:txBody>
@@ -4664,7 +4664,7 @@
                         <a:rPr sz="800">
                           <a:latin typeface="Segoe UI"/>
                         </a:rPr>
-                        <a:t>18.5%</a:t>
+                        <a:t>18.1%</a:t>
                       </a:r>
                     </a:p>
                   </a:txBody>
@@ -4707,7 +4707,7 @@
                           </a:solidFill>
                           <a:latin typeface="Segoe UI"/>
                         </a:rPr>
-                        <a:t>9.1%</a:t>
+                        <a:t>9.4%</a:t>
                       </a:r>
                     </a:p>
                   </a:txBody>
@@ -4747,7 +4747,7 @@
                         <a:rPr sz="800">
                           <a:latin typeface="Segoe UI"/>
                         </a:rPr>
-                        <a:t>18.9%</a:t>
+                        <a:t>19.0%</a:t>
                       </a:r>
                     </a:p>
                   </a:txBody>
@@ -4866,7 +4866,7 @@
                         <a:rPr sz="800">
                           <a:latin typeface="Segoe UI"/>
                         </a:rPr>
-                        <a:t>103</a:t>
+                        <a:t>104</a:t>
                       </a:r>
                     </a:p>
                   </a:txBody>
@@ -4906,7 +4906,7 @@
                           </a:solidFill>
                           <a:latin typeface="Segoe UI"/>
                         </a:rPr>
-                        <a:t>72</a:t>
+                        <a:t>71</a:t>
                       </a:r>
                     </a:p>
                   </a:txBody>
@@ -4943,7 +4943,7 @@
                         <a:rPr sz="800">
                           <a:latin typeface="Segoe UI"/>
                         </a:rPr>
-                        <a:t>109</a:t>
+                        <a:t>107</a:t>
                       </a:r>
                     </a:p>
                   </a:txBody>
@@ -4983,7 +4983,7 @@
                           </a:solidFill>
                           <a:latin typeface="Segoe UI"/>
                         </a:rPr>
-                        <a:t>46</a:t>
+                        <a:t>50</a:t>
                       </a:r>
                     </a:p>
                   </a:txBody>
@@ -5020,7 +5020,7 @@
                         <a:rPr sz="800">
                           <a:latin typeface="Segoe UI"/>
                         </a:rPr>
-                        <a:t>114</a:t>
+                        <a:t>115</a:t>
                       </a:r>
                     </a:p>
                   </a:txBody>
@@ -5262,7 +5262,7 @@
                           </a:solidFill>
                           <a:latin typeface="Segoe UI"/>
                         </a:rPr>
-                        <a:t>$998.0K</a:t>
+                        <a:t>$999.0K</a:t>
                       </a:r>
                     </a:p>
                   </a:txBody>

--- a/generated/Tier 1 Broker Scorecards/American Fleet Insurance_Broker_Scorecard.pptx
+++ b/generated/Tier 1 Broker Scorecards/American Fleet Insurance_Broker_Scorecard.pptx
@@ -3357,7 +3357,7 @@
                         <a:rPr sz="800">
                           <a:latin typeface="Segoe UI"/>
                         </a:rPr>
-                        <a:t>$10,036,377.54 / $11,252,964.33 / $4,053,812.15</a:t>
+                        <a:t>$10,036,377.54 / $11,261,436.48 / $4,062,284.30</a:t>
                       </a:r>
                     </a:p>
                   </a:txBody>
@@ -3653,7 +3653,7 @@
                         <a:rPr sz="900">
                           <a:latin typeface="Segoe UI"/>
                         </a:rPr>
-                        <a:t>Fleet Subs: 132  |  Binds: 8</a:t>
+                        <a:t>Fleet Subs: 132  |  Binds: 9</a:t>
                       </a:r>
                     </a:p>
                   </a:txBody>
@@ -3690,7 +3690,7 @@
                         <a:rPr sz="900">
                           <a:latin typeface="Segoe UI"/>
                         </a:rPr>
-                        <a:t>Fleet Bound Premium: $393,129.72</a:t>
+                        <a:t>Fleet Bound Premium: $530,468.13</a:t>
                       </a:r>
                     </a:p>
                   </a:txBody>
@@ -3727,7 +3727,7 @@
                         <a:rPr sz="900">
                           <a:latin typeface="Segoe UI"/>
                         </a:rPr>
-                        <a:t>Fleet Book %: 9.7%</a:t>
+                        <a:t>Fleet Book %: 13.1%</a:t>
                       </a:r>
                     </a:p>
                   </a:txBody>
@@ -3766,7 +3766,7 @@
                         <a:rPr sz="900">
                           <a:latin typeface="Segoe UI"/>
                         </a:rPr>
-                        <a:t>Non-Fleet Subs: 2554  |  Binds: 195</a:t>
+                        <a:t>Non-Fleet Subs: 2578  |  Binds: 196</a:t>
                       </a:r>
                     </a:p>
                   </a:txBody>
@@ -3803,7 +3803,7 @@
                         <a:rPr sz="900">
                           <a:latin typeface="Segoe UI"/>
                         </a:rPr>
-                        <a:t>Non-Fleet Bound Premium: $3,660,682.43</a:t>
+                        <a:t>Non-Fleet Bound Premium: $3,531,816.17</a:t>
                       </a:r>
                     </a:p>
                   </a:txBody>
@@ -3840,7 +3840,7 @@
                         <a:rPr sz="900">
                           <a:latin typeface="Segoe UI"/>
                         </a:rPr>
-                        <a:t>Non-Fleet Book %: 90.3%</a:t>
+                        <a:t>Non-Fleet Book %: 86.9%</a:t>
                       </a:r>
                     </a:p>
                   </a:txBody>
@@ -4351,7 +4351,7 @@
                           </a:solidFill>
                           <a:latin typeface="Segoe UI"/>
                         </a:rPr>
-                        <a:t>659</a:t>
+                        <a:t>660</a:t>
                       </a:r>
                     </a:p>
                   </a:txBody>
@@ -4428,7 +4428,7 @@
                           </a:solidFill>
                           <a:latin typeface="Segoe UI"/>
                         </a:rPr>
-                        <a:t>534</a:t>
+                        <a:t>558</a:t>
                       </a:r>
                     </a:p>
                   </a:txBody>
@@ -4465,7 +4465,7 @@
                         <a:rPr sz="800">
                           <a:latin typeface="Segoe UI"/>
                         </a:rPr>
-                        <a:t>604</a:t>
+                        <a:t>603</a:t>
                       </a:r>
                     </a:p>
                   </a:txBody>
@@ -4581,7 +4581,7 @@
                         <a:rPr sz="800">
                           <a:latin typeface="Segoe UI"/>
                         </a:rPr>
-                        <a:t>13.4%</a:t>
+                        <a:t>13.3%</a:t>
                       </a:r>
                     </a:p>
                   </a:txBody>
@@ -4624,7 +4624,7 @@
                           </a:solidFill>
                           <a:latin typeface="Segoe UI"/>
                         </a:rPr>
-                        <a:t>10.8%</a:t>
+                        <a:t>10.9%</a:t>
                       </a:r>
                     </a:p>
                   </a:txBody>
@@ -4664,7 +4664,7 @@
                         <a:rPr sz="800">
                           <a:latin typeface="Segoe UI"/>
                         </a:rPr>
-                        <a:t>18.1%</a:t>
+                        <a:t>18.3%</a:t>
                       </a:r>
                     </a:p>
                   </a:txBody>
@@ -4707,7 +4707,7 @@
                           </a:solidFill>
                           <a:latin typeface="Segoe UI"/>
                         </a:rPr>
-                        <a:t>9.4%</a:t>
+                        <a:t>9.1%</a:t>
                       </a:r>
                     </a:p>
                   </a:txBody>
@@ -4747,7 +4747,7 @@
                         <a:rPr sz="800">
                           <a:latin typeface="Segoe UI"/>
                         </a:rPr>
-                        <a:t>19.0%</a:t>
+                        <a:t>18.7%</a:t>
                       </a:r>
                     </a:p>
                   </a:txBody>
@@ -4866,7 +4866,7 @@
                         <a:rPr sz="800">
                           <a:latin typeface="Segoe UI"/>
                         </a:rPr>
-                        <a:t>104</a:t>
+                        <a:t>103</a:t>
                       </a:r>
                     </a:p>
                   </a:txBody>
@@ -4906,7 +4906,7 @@
                           </a:solidFill>
                           <a:latin typeface="Segoe UI"/>
                         </a:rPr>
-                        <a:t>71</a:t>
+                        <a:t>72</a:t>
                       </a:r>
                     </a:p>
                   </a:txBody>
@@ -4943,7 +4943,7 @@
                         <a:rPr sz="800">
                           <a:latin typeface="Segoe UI"/>
                         </a:rPr>
-                        <a:t>107</a:t>
+                        <a:t>108</a:t>
                       </a:r>
                     </a:p>
                   </a:txBody>
@@ -4983,7 +4983,7 @@
                           </a:solidFill>
                           <a:latin typeface="Segoe UI"/>
                         </a:rPr>
-                        <a:t>50</a:t>
+                        <a:t>51</a:t>
                       </a:r>
                     </a:p>
                   </a:txBody>
@@ -5020,7 +5020,7 @@
                         <a:rPr sz="800">
                           <a:latin typeface="Segoe UI"/>
                         </a:rPr>
-                        <a:t>115</a:t>
+                        <a:t>113</a:t>
                       </a:r>
                     </a:p>
                   </a:txBody>
@@ -5262,7 +5262,7 @@
                           </a:solidFill>
                           <a:latin typeface="Segoe UI"/>
                         </a:rPr>
-                        <a:t>$999.0K</a:t>
+                        <a:t>$1.01M</a:t>
                       </a:r>
                     </a:p>
                   </a:txBody>
@@ -5345,7 +5345,7 @@
                           </a:solidFill>
                           <a:latin typeface="Segoe UI"/>
                         </a:rPr>
-                        <a:t>$26.0K</a:t>
+                        <a:t>$54.6K</a:t>
                       </a:r>
                     </a:p>
                   </a:txBody>

--- a/generated/Tier 1 Broker Scorecards/American Fleet Insurance_Broker_Scorecard.pptx
+++ b/generated/Tier 1 Broker Scorecards/American Fleet Insurance_Broker_Scorecard.pptx
@@ -3394,7 +3394,7 @@
                         <a:rPr sz="900">
                           <a:latin typeface="Segoe UI"/>
                         </a:rPr>
-                        <a:t>Tier 1  |  7.56% / 15.00%</a:t>
+                        <a:t>Tier 1  |  7.49% / 15.00%</a:t>
                       </a:r>
                     </a:p>
                   </a:txBody>
@@ -3690,7 +3690,7 @@
                         <a:rPr sz="900">
                           <a:latin typeface="Segoe UI"/>
                         </a:rPr>
-                        <a:t>Fleet Bound Premium: $530,468.13</a:t>
+                        <a:t>Fleet Bound Premium: $537,022.21</a:t>
                       </a:r>
                     </a:p>
                   </a:txBody>
@@ -3727,7 +3727,7 @@
                         <a:rPr sz="900">
                           <a:latin typeface="Segoe UI"/>
                         </a:rPr>
-                        <a:t>Fleet Book %: 13.1%</a:t>
+                        <a:t>Fleet Book %: 13.2%</a:t>
                       </a:r>
                     </a:p>
                   </a:txBody>
@@ -3766,7 +3766,7 @@
                         <a:rPr sz="900">
                           <a:latin typeface="Segoe UI"/>
                         </a:rPr>
-                        <a:t>Non-Fleet Subs: 2578  |  Binds: 196</a:t>
+                        <a:t>Non-Fleet Subs: 2579  |  Binds: 194</a:t>
                       </a:r>
                     </a:p>
                   </a:txBody>
@@ -3803,7 +3803,7 @@
                         <a:rPr sz="900">
                           <a:latin typeface="Segoe UI"/>
                         </a:rPr>
-                        <a:t>Non-Fleet Bound Premium: $3,531,816.17</a:t>
+                        <a:t>Non-Fleet Bound Premium: $3,525,262.09</a:t>
                       </a:r>
                     </a:p>
                   </a:txBody>
@@ -3840,7 +3840,7 @@
                         <a:rPr sz="900">
                           <a:latin typeface="Segoe UI"/>
                         </a:rPr>
-                        <a:t>Non-Fleet Book %: 86.9%</a:t>
+                        <a:t>Non-Fleet Book %: 86.8%</a:t>
                       </a:r>
                     </a:p>
                   </a:txBody>
@@ -4311,7 +4311,7 @@
                         <a:rPr sz="800">
                           <a:latin typeface="Segoe UI"/>
                         </a:rPr>
-                        <a:t>777</a:t>
+                        <a:t>776</a:t>
                       </a:r>
                     </a:p>
                   </a:txBody>
@@ -4428,7 +4428,7 @@
                           </a:solidFill>
                           <a:latin typeface="Segoe UI"/>
                         </a:rPr>
-                        <a:t>558</a:t>
+                        <a:t>559</a:t>
                       </a:r>
                     </a:p>
                   </a:txBody>
@@ -4581,7 +4581,7 @@
                         <a:rPr sz="800">
                           <a:latin typeface="Segoe UI"/>
                         </a:rPr>
-                        <a:t>13.3%</a:t>
+                        <a:t>13.1%</a:t>
                       </a:r>
                     </a:p>
                   </a:txBody>
@@ -4747,7 +4747,7 @@
                         <a:rPr sz="800">
                           <a:latin typeface="Segoe UI"/>
                         </a:rPr>
-                        <a:t>18.7%</a:t>
+                        <a:t>19.1%</a:t>
                       </a:r>
                     </a:p>
                   </a:txBody>
@@ -4866,7 +4866,7 @@
                         <a:rPr sz="800">
                           <a:latin typeface="Segoe UI"/>
                         </a:rPr>
-                        <a:t>103</a:t>
+                        <a:t>102</a:t>
                       </a:r>
                     </a:p>
                   </a:txBody>
@@ -5020,7 +5020,7 @@
                         <a:rPr sz="800">
                           <a:latin typeface="Segoe UI"/>
                         </a:rPr>
-                        <a:t>113</a:t>
+                        <a:t>115</a:t>
                       </a:r>
                     </a:p>
                   </a:txBody>

--- a/generated/Tier 1 Broker Scorecards/American Fleet Insurance_Broker_Scorecard.pptx
+++ b/generated/Tier 1 Broker Scorecards/American Fleet Insurance_Broker_Scorecard.pptx
@@ -3357,7 +3357,7 @@
                         <a:rPr sz="800">
                           <a:latin typeface="Segoe UI"/>
                         </a:rPr>
-                        <a:t>$10,036,377.54 / $11,261,436.48 / $4,062,284.30</a:t>
+                        <a:t>$10,036,377.54 / $10,293,984.59 / $4,116,909.85</a:t>
                       </a:r>
                     </a:p>
                   </a:txBody>
@@ -3394,7 +3394,7 @@
                         <a:rPr sz="900">
                           <a:latin typeface="Segoe UI"/>
                         </a:rPr>
-                        <a:t>Tier 1  |  7.49% / 15.00%</a:t>
+                        <a:t>Tier 1  |  7.52% / 15.00%</a:t>
                       </a:r>
                     </a:p>
                   </a:txBody>
@@ -3431,7 +3431,7 @@
                         <a:rPr sz="900">
                           <a:latin typeface="Segoe UI"/>
                         </a:rPr>
-                        <a:t>$14,050,928.56  (28.9% achieved)</a:t>
+                        <a:t>$14,050,928.56  (29.3% achieved)</a:t>
                       </a:r>
                     </a:p>
                   </a:txBody>
@@ -3690,7 +3690,7 @@
                         <a:rPr sz="900">
                           <a:latin typeface="Segoe UI"/>
                         </a:rPr>
-                        <a:t>Fleet Bound Premium: $537,022.21</a:t>
+                        <a:t>Fleet Bound Premium: $542,148.53</a:t>
                       </a:r>
                     </a:p>
                   </a:txBody>
@@ -3766,7 +3766,7 @@
                         <a:rPr sz="900">
                           <a:latin typeface="Segoe UI"/>
                         </a:rPr>
-                        <a:t>Non-Fleet Subs: 2579  |  Binds: 194</a:t>
+                        <a:t>Non-Fleet Subs: 2582  |  Binds: 195</a:t>
                       </a:r>
                     </a:p>
                   </a:txBody>
@@ -3803,7 +3803,7 @@
                         <a:rPr sz="900">
                           <a:latin typeface="Segoe UI"/>
                         </a:rPr>
-                        <a:t>Non-Fleet Bound Premium: $3,525,262.09</a:t>
+                        <a:t>Non-Fleet Bound Premium: $3,574,761.32</a:t>
                       </a:r>
                     </a:p>
                   </a:txBody>
@@ -4428,7 +4428,7 @@
                           </a:solidFill>
                           <a:latin typeface="Segoe UI"/>
                         </a:rPr>
-                        <a:t>559</a:t>
+                        <a:t>562</a:t>
                       </a:r>
                     </a:p>
                   </a:txBody>
@@ -4500,9 +4500,12 @@
                       <a:pPr algn="ctr"/>
                       <a:r>
                         <a:rPr sz="800">
+                          <a:solidFill>
+                            <a:srgbClr val="DC2626"/>
+                          </a:solidFill>
                           <a:latin typeface="Segoe UI"/>
                         </a:rPr>
-                        <a:t/>
+                        <a:t>3</a:t>
                       </a:r>
                     </a:p>
                   </a:txBody>
@@ -4664,7 +4667,7 @@
                         <a:rPr sz="800">
                           <a:latin typeface="Segoe UI"/>
                         </a:rPr>
-                        <a:t>18.3%</a:t>
+                        <a:t>18.1%</a:t>
                       </a:r>
                     </a:p>
                   </a:txBody>
@@ -4747,7 +4750,7 @@
                         <a:rPr sz="800">
                           <a:latin typeface="Segoe UI"/>
                         </a:rPr>
-                        <a:t>19.1%</a:t>
+                        <a:t>18.7%</a:t>
                       </a:r>
                     </a:p>
                   </a:txBody>
@@ -4943,7 +4946,7 @@
                         <a:rPr sz="800">
                           <a:latin typeface="Segoe UI"/>
                         </a:rPr>
-                        <a:t>108</a:t>
+                        <a:t>107</a:t>
                       </a:r>
                     </a:p>
                   </a:txBody>
@@ -5020,7 +5023,7 @@
                         <a:rPr sz="800">
                           <a:latin typeface="Segoe UI"/>
                         </a:rPr>
-                        <a:t>115</a:t>
+                        <a:t>113</a:t>
                       </a:r>
                     </a:p>
                   </a:txBody>
